--- a/ACL 2027/Storage/meeting_20260915/dreaddit_detailed_analysis.pptx
+++ b/ACL 2027/Storage/meeting_20260915/dreaddit_detailed_analysis.pptx
@@ -10766,7 +10766,7 @@
                 <a:ea typeface="Apple SD Gothic Neo"/>
                 <a:cs typeface="Calibri"/>
               </a:rPr>
-              <a:t>Does the AppWorld reproduction (running) show the same pattern?</a:t>
+              <a:t>AppWorld shows the same one-section pileup. Is that ACE’s general failure mode on small models?</a:t>
             </a:r>
           </a:p>
         </p:txBody>
